--- a/docs/主治医意見書読み取り_経過と精度.pptx
+++ b/docs/主治医意見書読み取り_経過と精度.pptx
@@ -3164,7 +3164,7 @@
                 </a:solidFill>
                 <a:latin typeface="Yu Gothic"/>
               </a:rPr>
-              <a:t>2026-09-06 〜 2026-09-23　コミット 83 件</a:t>
+              <a:t>2026-09-06 〜 2026-09-24　コミット 86 件</a:t>
             </a:r>
           </a:p>
         </p:txBody>
@@ -4191,7 +4191,7 @@
                 </a:solidFill>
                 <a:latin typeface="Yu Gothic"/>
               </a:rPr>
-              <a:t>詳しい実測値と、試して駄目だったことの記録は開発メモ（DEVNOTES.md）にあります。　作成 2026-09-23</a:t>
+              <a:t>詳しい実測値と、試して駄目だったことの記録は開発メモ（DEVNOTES.md）にあります。　作成 2026-09-24</a:t>
             </a:r>
           </a:p>
         </p:txBody>
@@ -7822,7 +7822,7 @@
         </p:nvGraphicFramePr>
         <p:xfrm>
           <a:off x="685800" y="1828800"/>
-          <a:ext cx="10972800" cy="2779776"/>
+          <a:ext cx="10972800" cy="3163824"/>
         </p:xfrm>
         <a:graphic>
           <a:graphicData uri="http://schemas.openxmlformats.org/drawingml/2006/table">
@@ -7834,7 +7834,7 @@
                 <a:gridCol w="7680960"/>
                 <a:gridCol w="3291840"/>
               </a:tblGrid>
-              <a:tr h="397110">
+              <a:tr h="395478">
                 <a:tc>
                   <a:txBody>
                     <a:bodyPr/>
@@ -7880,7 +7880,7 @@
                   </a:tcPr>
                 </a:tc>
               </a:tr>
-              <a:tr h="397110">
+              <a:tr h="395478">
                 <a:tc>
                   <a:txBody>
                     <a:bodyPr/>
@@ -7926,7 +7926,7 @@
                   </a:tcPr>
                 </a:tc>
               </a:tr>
-              <a:tr h="397110">
+              <a:tr h="395478">
                 <a:tc>
                   <a:txBody>
                     <a:bodyPr/>
@@ -7972,7 +7972,7 @@
                   </a:tcPr>
                 </a:tc>
               </a:tr>
-              <a:tr h="397110">
+              <a:tr h="395478">
                 <a:tc>
                   <a:txBody>
                     <a:bodyPr/>
@@ -8018,7 +8018,7 @@
                   </a:tcPr>
                 </a:tc>
               </a:tr>
-              <a:tr h="397110">
+              <a:tr h="395478">
                 <a:tc>
                   <a:txBody>
                     <a:bodyPr/>
@@ -8064,7 +8064,7 @@
                   </a:tcPr>
                 </a:tc>
               </a:tr>
-              <a:tr h="397110">
+              <a:tr h="395478">
                 <a:tc>
                   <a:txBody>
                     <a:bodyPr/>
@@ -8110,7 +8110,7 @@
                   </a:tcPr>
                 </a:tc>
               </a:tr>
-              <a:tr h="397116">
+              <a:tr h="395478">
                 <a:tc>
                   <a:txBody>
                     <a:bodyPr/>
@@ -8152,6 +8152,52 @@
                   <a:tcPr marT="38100" marB="38100">
                     <a:solidFill>
                       <a:srgbClr val="F2F5F9"/>
+                    </a:solidFill>
+                  </a:tcPr>
+                </a:tc>
+              </a:tr>
+              <a:tr h="395478">
+                <a:tc>
+                  <a:txBody>
+                    <a:bodyPr/>
+                    <a:lstStyle/>
+                    <a:p>
+                      <a:r>
+                        <a:rPr sz="1800" b="0">
+                          <a:solidFill>
+                            <a:srgbClr val="1B1F24"/>
+                          </a:solidFill>
+                          <a:latin typeface="Yu Gothic"/>
+                        </a:rPr>
+                        <a:t>誤字表を機械で作り、1,545語に増やした（市区町村1,914件を含む）</a:t>
+                      </a:r>
+                    </a:p>
+                  </a:txBody>
+                  <a:tcPr marT="38100" marB="38100">
+                    <a:solidFill>
+                      <a:srgbClr val="FFFFFF"/>
+                    </a:solidFill>
+                  </a:tcPr>
+                </a:tc>
+                <a:tc>
+                  <a:txBody>
+                    <a:bodyPr/>
+                    <a:lstStyle/>
+                    <a:p>
+                      <a:r>
+                        <a:rPr sz="1800" b="0">
+                          <a:solidFill>
+                            <a:srgbClr val="1A7F4B"/>
+                          </a:solidFill>
+                          <a:latin typeface="Yu Gothic"/>
+                        </a:rPr>
+                        <a:t>ブラウザ版 96.7 % → 97.1 %</a:t>
+                      </a:r>
+                    </a:p>
+                  </a:txBody>
+                  <a:tcPr marT="38100" marB="38100">
+                    <a:solidFill>
+                      <a:srgbClr val="FFFFFF"/>
                     </a:solidFill>
                   </a:tcPr>
                 </a:tc>
